--- a/docs/갓생살기_포트폴리오.pptx
+++ b/docs/갓생살기_포트폴리오.pptx
@@ -10619,7 +10619,7 @@
                 <a:ea typeface="Malgun Gothic" pitchFamily="34" charset="-122"/>
                 <a:cs typeface="Malgun Gothic" pitchFamily="34" charset="-120"/>
               </a:rPr>
-              <a:t>지금 하고 있는 것</a:t>
+              <a:t>설명할 수 있는 코드로</a:t>
             </a:r>
             <a:endParaRPr lang="en-US" sz="1900" dirty="0"/>
           </a:p>
@@ -10661,7 +10661,7 @@
                 <a:ea typeface="Malgun Gothic" pitchFamily="34" charset="-122"/>
                 <a:cs typeface="Malgun Gothic" pitchFamily="34" charset="-120"/>
               </a:rPr>
-              <a:t>만드는 것보다 "왜 이렇게 만들었는지" 이해하는 게 더 중요하다는 걸 느껴, 기능별로 코드를 다시 읽으며 공부하는 중</a:t>
+              <a:t>동작은 하지만 내가 왜 이렇게 만들었는지 설명하지 못하는 부분이 있다는 걸 깨닫고, 기능별로 코드 흐름을 다시 읽고 정리함 → 포인트 정산이 두 번 지급되지 않는 원리, AI 서버가 꺼져도 인증이 막히지 않는 처리 같은 핵심 로직을 직접 설명할 수 있게 됨</a:t>
             </a:r>
             <a:endParaRPr lang="en-US" sz="1350" dirty="0"/>
           </a:p>
